--- a/docs/Aged_Ticket_Advisor_Overview.pptx
+++ b/docs/Aged_Ticket_Advisor_Overview.pptx
@@ -1004,7 +1004,7 @@
           <a:lstStyle/>
           <a:p>
             <a:r>
-              <a:t>Spell out the read-only point here rather than at the end. It is the first question a Service Desk team asks, and answering it early buys attention for everything after.</a:t>
+              <a:t>Spell out the read-only point here rather than at the end. It is the first question a support team asks, and answering it early buys attention for everything after.</a:t>
             </a:r>
           </a:p>
         </p:txBody>
@@ -4599,7 +4599,7 @@
                 </a:solidFill>
                 <a:latin typeface="Segoe UI"/>
               </a:rPr>
-              <a:t>A read-only companion to ServiceNow for the Service Desk.  It never edits an incident.</a:t>
+              <a:t>A read-only companion to ServiceNow for any assignment group.  It never edits an incident.</a:t>
             </a:r>
           </a:p>
         </p:txBody>
@@ -5816,7 +5816,7 @@
                 </a:solidFill>
                 <a:latin typeface="Segoe UI"/>
               </a:rPr>
-              <a:t>Aged Ticket Advisor  ·  Service Desk introduction</a:t>
+              <a:t>Aged Ticket Advisor  ·  Team introduction</a:t>
             </a:r>
           </a:p>
         </p:txBody>
@@ -6180,7 +6180,7 @@
                 </a:solidFill>
                 <a:latin typeface="Segoe UI"/>
               </a:rPr>
-              <a:t>·  Separate database and service from the existing audit tool.</a:t>
+              <a:t>·  Digests and alerts are scoped the same way: a lead covering two queues gets one email containing those two, never a third.</a:t>
             </a:r>
           </a:p>
           <a:p>
@@ -6202,7 +6202,7 @@
                 </a:solidFill>
                 <a:latin typeface="Segoe UI"/>
               </a:rPr>
-              <a:t>·  Credentials held in Vault; nothing in a config file.</a:t>
+              <a:t>·  Separate database and service from the existing audit tool.</a:t>
             </a:r>
           </a:p>
           <a:p>
@@ -6224,6 +6224,28 @@
                 </a:solidFill>
                 <a:latin typeface="Segoe UI"/>
               </a:rPr>
+              <a:t>·  Credentials held in Vault; nothing in a config file.</a:t>
+            </a:r>
+          </a:p>
+          <a:p>
+            <a:pPr>
+              <a:lnSpc>
+                <a:spcPct val="118000"/>
+              </a:lnSpc>
+              <a:spcBef>
+                <a:spcPts val="1000"/>
+              </a:spcBef>
+              <a:spcAft>
+                <a:spcPts val="0"/>
+              </a:spcAft>
+            </a:pPr>
+            <a:r>
+              <a:rPr sz="1400" b="0">
+                <a:solidFill>
+                  <a:srgbClr val="0B0B0B"/>
+                </a:solidFill>
+                <a:latin typeface="Segoe UI"/>
+              </a:rPr>
               <a:t>·  All times shown in US Central, switchable per person.</a:t>
             </a:r>
           </a:p>
@@ -6258,7 +6280,7 @@
                 </a:solidFill>
                 <a:latin typeface="Segoe UI"/>
               </a:rPr>
-              <a:t>Aged Ticket Advisor  ·  Service Desk introduction</a:t>
+              <a:t>Aged Ticket Advisor  ·  Team introduction</a:t>
             </a:r>
           </a:p>
         </p:txBody>
@@ -6722,7 +6744,7 @@
                 </a:solidFill>
                 <a:latin typeface="Segoe UI"/>
               </a:rPr>
-              <a:t>Aged Ticket Advisor  ·  Service Desk introduction</a:t>
+              <a:t>Aged Ticket Advisor  ·  Team introduction</a:t>
             </a:r>
           </a:p>
         </p:txBody>
@@ -6986,7 +7008,7 @@
                 </a:solidFill>
                 <a:latin typeface="Segoe UI"/>
               </a:rPr>
-              <a:t>Aged Ticket Advisor  ·  Service Desk introduction</a:t>
+              <a:t>Aged Ticket Advisor  ·  Team introduction</a:t>
             </a:r>
           </a:p>
         </p:txBody>
@@ -7250,7 +7272,7 @@
                 </a:solidFill>
                 <a:latin typeface="Segoe UI"/>
               </a:rPr>
-              <a:t>Aged Ticket Advisor  ·  Service Desk introduction</a:t>
+              <a:t>Aged Ticket Advisor  ·  Team introduction</a:t>
             </a:r>
           </a:p>
         </p:txBody>
@@ -7714,7 +7736,7 @@
                 </a:solidFill>
                 <a:latin typeface="Segoe UI"/>
               </a:rPr>
-              <a:t>Aged Ticket Advisor  ·  Service Desk introduction</a:t>
+              <a:t>Aged Ticket Advisor  ·  Team introduction</a:t>
             </a:r>
           </a:p>
         </p:txBody>
@@ -8872,7 +8894,7 @@
                 </a:solidFill>
                 <a:latin typeface="Segoe UI"/>
               </a:rPr>
-              <a:t>Aged Ticket Advisor  ·  Service Desk introduction</a:t>
+              <a:t>Aged Ticket Advisor  ·  Team introduction</a:t>
             </a:r>
           </a:p>
         </p:txBody>
@@ -9462,7 +9484,7 @@
                 </a:solidFill>
                 <a:latin typeface="Segoe UI"/>
               </a:rPr>
-              <a:t>Service Desk, Caller, Vendor, Change, Problem or Approval - derived, not taken from the hold reason at face value.</a:t>
+              <a:t>Assigned team, Caller, Vendor, Change, Problem or Approval - derived, not taken from the hold reason at face value.</a:t>
             </a:r>
           </a:p>
         </p:txBody>
@@ -10124,7 +10146,7 @@
                 </a:solidFill>
                 <a:latin typeface="Segoe UI"/>
               </a:rPr>
-              <a:t>Aged Ticket Advisor  ·  Service Desk introduction</a:t>
+              <a:t>Aged Ticket Advisor  ·  Team introduction</a:t>
             </a:r>
           </a:p>
         </p:txBody>
@@ -10846,7 +10868,7 @@
                 </a:solidFill>
                 <a:latin typeface="Segoe UI"/>
               </a:rPr>
-              <a:t>Time since the last real Service Desk action</a:t>
+              <a:t>Time since the last real action by the assigned team</a:t>
             </a:r>
           </a:p>
         </p:txBody>
@@ -12129,7 +12151,7 @@
                 </a:solidFill>
                 <a:latin typeface="Segoe UI"/>
               </a:rPr>
-              <a:t>Aged Ticket Advisor  ·  Service Desk introduction</a:t>
+              <a:t>Aged Ticket Advisor  ·  Team introduction</a:t>
             </a:r>
           </a:p>
         </p:txBody>
@@ -12840,7 +12862,7 @@
                 </a:solidFill>
                 <a:latin typeface="Segoe UI"/>
               </a:rPr>
-              <a:t>Aged Ticket Advisor  ·  Service Desk introduction</a:t>
+              <a:t>Aged Ticket Advisor  ·  Team introduction</a:t>
             </a:r>
           </a:p>
         </p:txBody>
@@ -14047,7 +14069,7 @@
                 </a:solidFill>
                 <a:latin typeface="Segoe UI"/>
               </a:rPr>
-              <a:t>Aged Ticket Advisor  ·  Service Desk introduction</a:t>
+              <a:t>Aged Ticket Advisor  ·  Team introduction</a:t>
             </a:r>
           </a:p>
         </p:txBody>
@@ -14311,7 +14333,7 @@
                 </a:solidFill>
                 <a:latin typeface="Segoe UI"/>
               </a:rPr>
-              <a:t>Aged Ticket Advisor  ·  Service Desk introduction</a:t>
+              <a:t>Aged Ticket Advisor  ·  Team introduction</a:t>
             </a:r>
           </a:p>
         </p:txBody>

--- a/docs/Aged_Ticket_Advisor_Overview.pptx
+++ b/docs/Aged_Ticket_Advisor_Overview.pptx
@@ -8347,7 +8347,7 @@
                 </a:solidFill>
                 <a:latin typeface="Segoe UI"/>
               </a:rPr>
-              <a:t>Advise</a:t>
+              <a:t>Refresh</a:t>
             </a:r>
           </a:p>
           <a:p>
@@ -8369,7 +8369,7 @@
                 </a:solidFill>
                 <a:latin typeface="Segoe UI"/>
               </a:rPr>
-              <a:t>Language model pass over tickets whose content actually changed. Everything else is served from cache.</a:t>
+              <a:t>Full sync - retires tickets that have been resolved or moved to another team - then a language model pass over whatever actually changed.</a:t>
             </a:r>
           </a:p>
         </p:txBody>
@@ -8592,7 +8592,7 @@
                 </a:solidFill>
                 <a:latin typeface="Segoe UI"/>
               </a:rPr>
-              <a:t>Ranked email to leads, then a short list to each agent.</a:t>
+              <a:t>One ranked email per assignment group to its leads, then a short list to each agent.</a:t>
             </a:r>
           </a:p>
         </p:txBody>
@@ -8815,7 +8815,7 @@
                 </a:solidFill>
                 <a:latin typeface="Segoe UI"/>
               </a:rPr>
-              <a:t>Full sync, retire departed tickets, rebuild the evidence index and resolution baselines.</a:t>
+              <a:t>Rebuild the evidence index and the resolution baselines.</a:t>
             </a:r>
           </a:p>
         </p:txBody>
@@ -13407,7 +13407,7 @@
                 </a:solidFill>
                 <a:latin typeface="Segoe UI"/>
               </a:rPr>
-              <a:t>What is new, what got worse, and what is waiting on us - in one email, before the shift.</a:t>
+              <a:t>What is new, what got worse, and what is waiting on us - one email per assignment group, before the shift.</a:t>
             </a:r>
           </a:p>
         </p:txBody>
@@ -13721,7 +13721,7 @@
                 </a:solidFill>
                 <a:latin typeface="Segoe UI"/>
               </a:rPr>
-              <a:t>Breach, inactivity and unanswered-caller events, once per ticket per type per day.</a:t>
+              <a:t>Breach, inactivity and unanswered-caller events, once per ticket per type per day, split by group.</a:t>
             </a:r>
           </a:p>
         </p:txBody>
